--- a/assets/pptx/catalog-665.pptx
+++ b/assets/pptx/catalog-665.pptx
@@ -3323,7 +3323,7 @@
                 <a:ea typeface="Ebrima"/>
                 <a:cs typeface="Ebrima"/>
               </a:rPr>
-              <a:t>ዛሬም እንደጥንቱ እምነት አለኝ (2x)</a:t>
+              <a:t>ዛሬም እንደጥንቱ እምነት አለኝ 2x</a:t>
             </a:r>
           </a:p>
         </p:txBody>
@@ -3444,7 +3444,7 @@
                 <a:ea typeface="Ebrima"/>
                 <a:cs typeface="Ebrima"/>
               </a:rPr>
-              <a:t>ለመውጣት ለመውረስ ኃይል የአንተ ነውና (2x)</a:t>
+              <a:t>ለመውጣት ለመውረስ ኃይል የአንተ ነውና 2x</a:t>
             </a:r>
           </a:p>
           <a:p>
@@ -3601,7 +3601,7 @@
                 <a:ea typeface="Ebrima"/>
                 <a:cs typeface="Ebrima"/>
               </a:rPr>
-              <a:t>ዛሬም እንደጥንቱ እምነት አለኝ (4x)</a:t>
+              <a:t>ዛሬም እንደጥንቱ እምነት አለኝ 4x</a:t>
             </a:r>
           </a:p>
         </p:txBody>
@@ -3740,7 +3740,7 @@
                 <a:ea typeface="Ebrima"/>
                 <a:cs typeface="Ebrima"/>
               </a:rPr>
-              <a:t>ዛሬም እንደጥንቱ እምነት አለኝ (2x)</a:t>
+              <a:t>ዛሬም እንደጥንቱ እምነት አለኝ 2x</a:t>
             </a:r>
           </a:p>
         </p:txBody>
@@ -3861,7 +3861,7 @@
                 <a:ea typeface="Ebrima"/>
                 <a:cs typeface="Ebrima"/>
               </a:rPr>
-              <a:t>እምነቴ ብርቱ ነው አልነቃነቃም (3x)</a:t>
+              <a:t>እምነቴ ብርቱ ነው አልነቃነቃም 3x</a:t>
             </a:r>
           </a:p>
         </p:txBody>
@@ -4000,7 +4000,7 @@
                 <a:ea typeface="Ebrima"/>
                 <a:cs typeface="Ebrima"/>
               </a:rPr>
-              <a:t>ዛሬም እንደጥንቱ እምነት አለኝ (2x)</a:t>
+              <a:t>ዛሬም እንደጥንቱ እምነት አለኝ 2x</a:t>
             </a:r>
           </a:p>
         </p:txBody>
@@ -4121,7 +4121,7 @@
                 <a:ea typeface="Ebrima"/>
                 <a:cs typeface="Ebrima"/>
               </a:rPr>
-              <a:t>ለጠላቴ ዛቻ ጉልበቴም አይላላ (3x)</a:t>
+              <a:t>ለጠላቴ ዛቻ ጉልበቴም አይላላ 3x</a:t>
             </a:r>
           </a:p>
         </p:txBody>
@@ -4260,7 +4260,7 @@
                 <a:ea typeface="Ebrima"/>
                 <a:cs typeface="Ebrima"/>
               </a:rPr>
-              <a:t>ዛሬም እንደጥንቱ እምነት አለኝ (2x)</a:t>
+              <a:t>ዛሬም እንደጥንቱ እምነት አለኝ 2x</a:t>
             </a:r>
           </a:p>
         </p:txBody>
@@ -4381,7 +4381,7 @@
                 <a:ea typeface="Ebrima"/>
                 <a:cs typeface="Ebrima"/>
               </a:rPr>
-              <a:t>ኤልዛቤልን ስጠኝ የህዝብህን . (1) . (2x)</a:t>
+              <a:t>ኤልዛቤልን ስጠኝ የህዝብህን . 1 . 2x</a:t>
             </a:r>
           </a:p>
           <a:p>
@@ -4399,7 +4399,7 @@
                 <a:ea typeface="Ebrima"/>
                 <a:cs typeface="Ebrima"/>
               </a:rPr>
-              <a:t>ስጠኝ ኤልዛቤልን የህዝብህን . (1) .</a:t>
+              <a:t>ስጠኝ ኤልዛቤልን የህዝብህን . 1 .</a:t>
             </a:r>
           </a:p>
         </p:txBody>
@@ -4538,7 +4538,7 @@
                 <a:ea typeface="Ebrima"/>
                 <a:cs typeface="Ebrima"/>
               </a:rPr>
-              <a:t>ዛሬም እንደጥንቱ እምነት አለኝ (2x)</a:t>
+              <a:t>ዛሬም እንደጥንቱ እምነት አለኝ 2x</a:t>
             </a:r>
           </a:p>
         </p:txBody>
@@ -4659,7 +4659,7 @@
                 <a:ea typeface="Ebrima"/>
                 <a:cs typeface="Ebrima"/>
               </a:rPr>
-              <a:t>ለፈረሰው ቅጥር ለቤትህ ጉበኛ (3x)</a:t>
+              <a:t>ለፈረሰው ቅጥር ለቤትህ ጉበኛ 3x</a:t>
             </a:r>
           </a:p>
         </p:txBody>
